--- a/content/slides/03-comparing-models.pptx
+++ b/content/slides/03-comparing-models.pptx
@@ -14,9 +14,10 @@
     <p:sldId id="262" r:id="rId8"/>
     <p:sldId id="263" r:id="rId9"/>
     <p:sldId id="264" r:id="rId10"/>
+    <p:sldId id="265" r:id="rId11"/>
   </p:sldIdLst>
   <p:notesMasterIdLst>
-    <p:notesMasterId r:id="rId11"/>
+    <p:notesMasterId r:id="rId12"/>
   </p:notesMasterIdLst>
   <p:sldSz cx="12192000" cy="6858000"/>
   <p:notesSz cx="6858000" cy="12192000"/>
@@ -552,6 +553,94 @@
 </p:notes>
 </file>
 
+<file path=ppt/notesSlides/notesSlide10.xml><?xml version="1.0" encoding="utf-8"?>
+<p:notes xmlns:a="http://schemas.openxmlformats.org/drawingml/2006/main" xmlns:r="http://schemas.openxmlformats.org/officeDocument/2006/relationships" xmlns:p="http://schemas.openxmlformats.org/presentationml/2006/main">
+  <p:cSld>
+    <p:spTree>
+      <p:nvGrpSpPr>
+        <p:cNvPr id="1" name=""/>
+        <p:cNvGrpSpPr/>
+        <p:nvPr/>
+      </p:nvGrpSpPr>
+      <p:grpSpPr>
+        <a:xfrm>
+          <a:off x="0" y="0"/>
+          <a:ext cx="0" cy="0"/>
+          <a:chOff x="0" y="0"/>
+          <a:chExt cx="0" cy="0"/>
+        </a:xfrm>
+      </p:grpSpPr>
+      <p:sp>
+        <p:nvSpPr>
+          <p:cNvPr id="2" name="Slide Image Placeholder 1"/>
+          <p:cNvSpPr>
+            <a:spLocks noGrp="1" noRot="1" noChangeAspect="1"/>
+          </p:cNvSpPr>
+          <p:nvPr>
+            <p:ph type="sldImg"/>
+          </p:nvPr>
+        </p:nvSpPr>
+        <p:spPr/>
+      </p:sp>
+      <p:sp>
+        <p:nvSpPr>
+          <p:cNvPr id="3" name="Notes Placeholder 2"/>
+          <p:cNvSpPr>
+            <a:spLocks noGrp="1"/>
+          </p:cNvSpPr>
+          <p:nvPr>
+            <p:ph type="body" idx="1"/>
+          </p:nvPr>
+        </p:nvSpPr>
+        <p:spPr/>
+        <p:txBody>
+          <a:bodyPr/>
+          <a:lstStyle/>
+          <a:p>
+            <a:r>
+              <a:rPr lang="en-US" dirty="0"/>
+              <a:t/>
+            </a:r>
+            <a:endParaRPr lang="en-US" dirty="0"/>
+          </a:p>
+        </p:txBody>
+      </p:sp>
+      <p:sp>
+        <p:nvSpPr>
+          <p:cNvPr id="4" name="Slide Number Placeholder 3"/>
+          <p:cNvSpPr>
+            <a:spLocks noGrp="1"/>
+          </p:cNvSpPr>
+          <p:nvPr>
+            <p:ph type="sldNum" sz="quarter" idx="10"/>
+          </p:nvPr>
+        </p:nvSpPr>
+        <p:spPr/>
+        <p:txBody>
+          <a:bodyPr/>
+          <a:lstStyle/>
+          <a:p>
+            <a:fld id="{F7021451-1387-4CA6-816F-3879F97B5CBC}" type="slidenum">
+              <a:rPr lang="en-US"/>
+              <a:t>10</a:t>
+            </a:fld>
+            <a:endParaRPr lang="en-US"/>
+          </a:p>
+        </p:txBody>
+      </p:sp>
+    </p:spTree>
+    <p:extLst>
+      <p:ext uri="{BB962C8B-B14F-4D97-AF65-F5344CB8AC3E}">
+        <p14:creationId xmlns:p14="http://schemas.microsoft.com/office/powerpoint/2010/main" val="1024086991"/>
+      </p:ext>
+    </p:extLst>
+  </p:cSld>
+  <p:clrMapOvr>
+    <a:masterClrMapping/>
+  </p:clrMapOvr>
+</p:notes>
+</file>
+
 <file path=ppt/notesSlides/notesSlide2.xml><?xml version="1.0" encoding="utf-8"?>
 <p:notes xmlns:a="http://schemas.openxmlformats.org/drawingml/2006/main" xmlns:r="http://schemas.openxmlformats.org/officeDocument/2006/relationships" xmlns:p="http://schemas.openxmlformats.org/presentationml/2006/main">
   <p:cSld>
@@ -1985,7 +2074,7 @@
                 <a:ea typeface="Courier New" pitchFamily="34" charset="-122"/>
                 <a:cs typeface="Courier New" pitchFamily="34" charset="-120"/>
               </a:rPr>
-              <a:t>1 / 9</a:t>
+              <a:t>1 / 10</a:t>
             </a:r>
             <a:endParaRPr lang="en-US" sz="1080" dirty="0"/>
           </a:p>
@@ -2299,6 +2388,1042 @@
               <a:t>Spring AI with Llama  ·  PromptToApps</a:t>
             </a:r>
             <a:endParaRPr lang="en-US" sz="1560" dirty="0"/>
+          </a:p>
+        </p:txBody>
+      </p:sp>
+    </p:spTree>
+  </p:cSld>
+  <p:clrMapOvr>
+    <a:masterClrMapping/>
+  </p:clrMapOvr>
+</p:sld>
+</file>
+
+<file path=ppt/slides/slide10.xml><?xml version="1.0" encoding="utf-8"?>
+<p:sld xmlns:a="http://schemas.openxmlformats.org/drawingml/2006/main" xmlns:r="http://schemas.openxmlformats.org/officeDocument/2006/relationships" xmlns:p="http://schemas.openxmlformats.org/presentationml/2006/main">
+  <p:cSld name="Slide 10">
+    <p:bg>
+      <p:bgPr>
+        <a:solidFill>
+          <a:srgbClr val="0A0F1C"/>
+        </a:solidFill>
+      </p:bgPr>
+    </p:bg>
+    <p:spTree>
+      <p:nvGrpSpPr>
+        <p:cNvPr id="1" name=""/>
+        <p:cNvGrpSpPr/>
+        <p:nvPr/>
+      </p:nvGrpSpPr>
+      <p:grpSpPr>
+        <a:xfrm>
+          <a:off x="0" y="0"/>
+          <a:ext cx="0" cy="0"/>
+          <a:chOff x="0" y="0"/>
+          <a:chExt cx="0" cy="0"/>
+        </a:xfrm>
+      </p:grpSpPr>
+      <p:sp>
+        <p:nvSpPr>
+          <p:cNvPr id="2" name="Shape 0"/>
+          <p:cNvSpPr/>
+          <p:nvPr/>
+        </p:nvSpPr>
+        <p:spPr>
+          <a:xfrm>
+            <a:off x="457200" y="365760"/>
+            <a:ext cx="731520" cy="457200"/>
+          </a:xfrm>
+          <a:prstGeom prst="line">
+            <a:avLst/>
+          </a:prstGeom>
+          <a:noFill/>
+          <a:ln w="9525">
+            <a:solidFill>
+              <a:srgbClr val="5B6478">
+                <a:alpha val="30000"/>
+              </a:srgbClr>
+            </a:solidFill>
+            <a:prstDash val="solid"/>
+          </a:ln>
+        </p:spPr>
+      </p:sp>
+      <p:sp>
+        <p:nvSpPr>
+          <p:cNvPr id="3" name="Shape 1"/>
+          <p:cNvSpPr/>
+          <p:nvPr/>
+        </p:nvSpPr>
+        <p:spPr>
+          <a:xfrm>
+            <a:off x="822960" y="822960"/>
+            <a:ext cx="365760" cy="731520"/>
+          </a:xfrm>
+          <a:prstGeom prst="line">
+            <a:avLst/>
+          </a:prstGeom>
+          <a:noFill/>
+          <a:ln w="9525">
+            <a:solidFill>
+              <a:srgbClr val="5B6478">
+                <a:alpha val="30000"/>
+              </a:srgbClr>
+            </a:solidFill>
+            <a:prstDash val="solid"/>
+          </a:ln>
+        </p:spPr>
+      </p:sp>
+      <p:sp>
+        <p:nvSpPr>
+          <p:cNvPr id="4" name="Shape 2"/>
+          <p:cNvSpPr/>
+          <p:nvPr/>
+        </p:nvSpPr>
+        <p:spPr>
+          <a:xfrm flipV="1">
+            <a:off x="822960" y="1280160"/>
+            <a:ext cx="914400" cy="274320"/>
+          </a:xfrm>
+          <a:prstGeom prst="line">
+            <a:avLst/>
+          </a:prstGeom>
+          <a:noFill/>
+          <a:ln w="9525">
+            <a:solidFill>
+              <a:srgbClr val="5B6478">
+                <a:alpha val="30000"/>
+              </a:srgbClr>
+            </a:solidFill>
+            <a:prstDash val="solid"/>
+          </a:ln>
+        </p:spPr>
+      </p:sp>
+      <p:sp>
+        <p:nvSpPr>
+          <p:cNvPr id="5" name="Shape 3"/>
+          <p:cNvSpPr/>
+          <p:nvPr/>
+        </p:nvSpPr>
+        <p:spPr>
+          <a:xfrm>
+            <a:off x="429768" y="338328"/>
+            <a:ext cx="54864" cy="54864"/>
+          </a:xfrm>
+          <a:prstGeom prst="ellipse">
+            <a:avLst/>
+          </a:prstGeom>
+          <a:solidFill>
+            <a:srgbClr val="8B98AC">
+              <a:alpha val="60000"/>
+            </a:srgbClr>
+          </a:solidFill>
+          <a:ln/>
+        </p:spPr>
+      </p:sp>
+      <p:sp>
+        <p:nvSpPr>
+          <p:cNvPr id="6" name="Shape 4"/>
+          <p:cNvSpPr/>
+          <p:nvPr/>
+        </p:nvSpPr>
+        <p:spPr>
+          <a:xfrm>
+            <a:off x="1161288" y="795528"/>
+            <a:ext cx="54864" cy="54864"/>
+          </a:xfrm>
+          <a:prstGeom prst="ellipse">
+            <a:avLst/>
+          </a:prstGeom>
+          <a:solidFill>
+            <a:srgbClr val="8B98AC">
+              <a:alpha val="60000"/>
+            </a:srgbClr>
+          </a:solidFill>
+          <a:ln/>
+        </p:spPr>
+      </p:sp>
+      <p:sp>
+        <p:nvSpPr>
+          <p:cNvPr id="7" name="Shape 5"/>
+          <p:cNvSpPr/>
+          <p:nvPr/>
+        </p:nvSpPr>
+        <p:spPr>
+          <a:xfrm>
+            <a:off x="795528" y="1527048"/>
+            <a:ext cx="54864" cy="54864"/>
+          </a:xfrm>
+          <a:prstGeom prst="ellipse">
+            <a:avLst/>
+          </a:prstGeom>
+          <a:solidFill>
+            <a:srgbClr val="8B98AC">
+              <a:alpha val="60000"/>
+            </a:srgbClr>
+          </a:solidFill>
+          <a:ln/>
+        </p:spPr>
+      </p:sp>
+      <p:sp>
+        <p:nvSpPr>
+          <p:cNvPr id="8" name="Shape 6"/>
+          <p:cNvSpPr/>
+          <p:nvPr/>
+        </p:nvSpPr>
+        <p:spPr>
+          <a:xfrm>
+            <a:off x="1709928" y="1252728"/>
+            <a:ext cx="54864" cy="54864"/>
+          </a:xfrm>
+          <a:prstGeom prst="ellipse">
+            <a:avLst/>
+          </a:prstGeom>
+          <a:solidFill>
+            <a:srgbClr val="8B98AC">
+              <a:alpha val="60000"/>
+            </a:srgbClr>
+          </a:solidFill>
+          <a:ln/>
+        </p:spPr>
+      </p:sp>
+      <p:sp>
+        <p:nvSpPr>
+          <p:cNvPr id="9" name="Shape 7"/>
+          <p:cNvSpPr/>
+          <p:nvPr/>
+        </p:nvSpPr>
+        <p:spPr>
+          <a:xfrm flipV="1">
+            <a:off x="10789920" y="5486400"/>
+            <a:ext cx="731520" cy="548640"/>
+          </a:xfrm>
+          <a:prstGeom prst="line">
+            <a:avLst/>
+          </a:prstGeom>
+          <a:noFill/>
+          <a:ln w="9525">
+            <a:solidFill>
+              <a:srgbClr val="5B6478">
+                <a:alpha val="30000"/>
+              </a:srgbClr>
+            </a:solidFill>
+            <a:prstDash val="solid"/>
+          </a:ln>
+        </p:spPr>
+      </p:sp>
+      <p:sp>
+        <p:nvSpPr>
+          <p:cNvPr id="10" name="Shape 8"/>
+          <p:cNvSpPr/>
+          <p:nvPr/>
+        </p:nvSpPr>
+        <p:spPr>
+          <a:xfrm flipV="1">
+            <a:off x="11155680" y="4754880"/>
+            <a:ext cx="365760" cy="731520"/>
+          </a:xfrm>
+          <a:prstGeom prst="line">
+            <a:avLst/>
+          </a:prstGeom>
+          <a:noFill/>
+          <a:ln w="9525">
+            <a:solidFill>
+              <a:srgbClr val="5B6478">
+                <a:alpha val="30000"/>
+              </a:srgbClr>
+            </a:solidFill>
+            <a:prstDash val="solid"/>
+          </a:ln>
+        </p:spPr>
+      </p:sp>
+      <p:sp>
+        <p:nvSpPr>
+          <p:cNvPr id="11" name="Shape 9"/>
+          <p:cNvSpPr/>
+          <p:nvPr/>
+        </p:nvSpPr>
+        <p:spPr>
+          <a:xfrm>
+            <a:off x="11155680" y="4754880"/>
+            <a:ext cx="731520" cy="365760"/>
+          </a:xfrm>
+          <a:prstGeom prst="line">
+            <a:avLst/>
+          </a:prstGeom>
+          <a:noFill/>
+          <a:ln w="9525">
+            <a:solidFill>
+              <a:srgbClr val="5B6478">
+                <a:alpha val="30000"/>
+              </a:srgbClr>
+            </a:solidFill>
+            <a:prstDash val="solid"/>
+          </a:ln>
+        </p:spPr>
+      </p:sp>
+      <p:sp>
+        <p:nvSpPr>
+          <p:cNvPr id="12" name="Shape 10"/>
+          <p:cNvSpPr/>
+          <p:nvPr/>
+        </p:nvSpPr>
+        <p:spPr>
+          <a:xfrm>
+            <a:off x="10762488" y="6007608"/>
+            <a:ext cx="54864" cy="54864"/>
+          </a:xfrm>
+          <a:prstGeom prst="ellipse">
+            <a:avLst/>
+          </a:prstGeom>
+          <a:solidFill>
+            <a:srgbClr val="8B98AC">
+              <a:alpha val="60000"/>
+            </a:srgbClr>
+          </a:solidFill>
+          <a:ln/>
+        </p:spPr>
+      </p:sp>
+      <p:sp>
+        <p:nvSpPr>
+          <p:cNvPr id="13" name="Shape 11"/>
+          <p:cNvSpPr/>
+          <p:nvPr/>
+        </p:nvSpPr>
+        <p:spPr>
+          <a:xfrm>
+            <a:off x="11494008" y="5458968"/>
+            <a:ext cx="54864" cy="54864"/>
+          </a:xfrm>
+          <a:prstGeom prst="ellipse">
+            <a:avLst/>
+          </a:prstGeom>
+          <a:solidFill>
+            <a:srgbClr val="8B98AC">
+              <a:alpha val="60000"/>
+            </a:srgbClr>
+          </a:solidFill>
+          <a:ln/>
+        </p:spPr>
+      </p:sp>
+      <p:sp>
+        <p:nvSpPr>
+          <p:cNvPr id="14" name="Shape 12"/>
+          <p:cNvSpPr/>
+          <p:nvPr/>
+        </p:nvSpPr>
+        <p:spPr>
+          <a:xfrm>
+            <a:off x="11128248" y="4727448"/>
+            <a:ext cx="54864" cy="54864"/>
+          </a:xfrm>
+          <a:prstGeom prst="ellipse">
+            <a:avLst/>
+          </a:prstGeom>
+          <a:solidFill>
+            <a:srgbClr val="8B98AC">
+              <a:alpha val="60000"/>
+            </a:srgbClr>
+          </a:solidFill>
+          <a:ln/>
+        </p:spPr>
+      </p:sp>
+      <p:sp>
+        <p:nvSpPr>
+          <p:cNvPr id="15" name="Shape 13"/>
+          <p:cNvSpPr/>
+          <p:nvPr/>
+        </p:nvSpPr>
+        <p:spPr>
+          <a:xfrm>
+            <a:off x="11859768" y="5093208"/>
+            <a:ext cx="54864" cy="54864"/>
+          </a:xfrm>
+          <a:prstGeom prst="ellipse">
+            <a:avLst/>
+          </a:prstGeom>
+          <a:solidFill>
+            <a:srgbClr val="8B98AC">
+              <a:alpha val="60000"/>
+            </a:srgbClr>
+          </a:solidFill>
+          <a:ln/>
+        </p:spPr>
+      </p:sp>
+      <p:sp>
+        <p:nvSpPr>
+          <p:cNvPr id="16" name="Text 14"/>
+          <p:cNvSpPr/>
+          <p:nvPr/>
+        </p:nvSpPr>
+        <p:spPr>
+          <a:xfrm>
+            <a:off x="457200" y="6355080"/>
+            <a:ext cx="2743200" cy="274320"/>
+          </a:xfrm>
+          <a:prstGeom prst="rect">
+            <a:avLst/>
+          </a:prstGeom>
+          <a:noFill/>
+          <a:ln/>
+        </p:spPr>
+        <p:txBody>
+          <a:bodyPr wrap="square" lIns="0" tIns="0" rIns="0" bIns="0" rtlCol="0" anchor="ctr"/>
+          <a:lstStyle/>
+          <a:p>
+            <a:pPr indent="0" marL="0">
+              <a:buNone/>
+            </a:pPr>
+            <a:r>
+              <a:rPr lang="en-US" sz="1080" dirty="0">
+                <a:solidFill>
+                  <a:srgbClr val="5B6478"/>
+                </a:solidFill>
+                <a:latin typeface="Courier New" pitchFamily="34" charset="0"/>
+                <a:ea typeface="Courier New" pitchFamily="34" charset="-122"/>
+                <a:cs typeface="Courier New" pitchFamily="34" charset="-120"/>
+              </a:rPr>
+              <a:t>PromptToApps</a:t>
+            </a:r>
+            <a:endParaRPr lang="en-US" sz="1080" dirty="0"/>
+          </a:p>
+        </p:txBody>
+      </p:sp>
+      <p:sp>
+        <p:nvSpPr>
+          <p:cNvPr id="17" name="Text 15"/>
+          <p:cNvSpPr/>
+          <p:nvPr/>
+        </p:nvSpPr>
+        <p:spPr>
+          <a:xfrm>
+            <a:off x="11247120" y="6355080"/>
+            <a:ext cx="731520" cy="274320"/>
+          </a:xfrm>
+          <a:prstGeom prst="rect">
+            <a:avLst/>
+          </a:prstGeom>
+          <a:noFill/>
+          <a:ln/>
+        </p:spPr>
+        <p:txBody>
+          <a:bodyPr wrap="square" lIns="0" tIns="0" rIns="0" bIns="0" rtlCol="0" anchor="ctr"/>
+          <a:lstStyle/>
+          <a:p>
+            <a:pPr algn="r" indent="0" marL="0">
+              <a:buNone/>
+            </a:pPr>
+            <a:r>
+              <a:rPr lang="en-US" sz="1080" dirty="0">
+                <a:solidFill>
+                  <a:srgbClr val="5B6478"/>
+                </a:solidFill>
+                <a:latin typeface="Courier New" pitchFamily="34" charset="0"/>
+                <a:ea typeface="Courier New" pitchFamily="34" charset="-122"/>
+                <a:cs typeface="Courier New" pitchFamily="34" charset="-120"/>
+              </a:rPr>
+              <a:t>10 / 10</a:t>
+            </a:r>
+            <a:endParaRPr lang="en-US" sz="1080" dirty="0"/>
+          </a:p>
+        </p:txBody>
+      </p:sp>
+      <p:sp>
+        <p:nvSpPr>
+          <p:cNvPr id="18" name="Text 16"/>
+          <p:cNvSpPr/>
+          <p:nvPr/>
+        </p:nvSpPr>
+        <p:spPr>
+          <a:xfrm>
+            <a:off x="640080" y="164592"/>
+            <a:ext cx="7315200" cy="274320"/>
+          </a:xfrm>
+          <a:prstGeom prst="rect">
+            <a:avLst/>
+          </a:prstGeom>
+          <a:noFill/>
+          <a:ln/>
+        </p:spPr>
+        <p:txBody>
+          <a:bodyPr wrap="square" lIns="0" tIns="0" rIns="0" bIns="0" rtlCol="0" anchor="ctr"/>
+          <a:lstStyle/>
+          <a:p>
+            <a:pPr indent="0" marL="0">
+              <a:buNone/>
+            </a:pPr>
+            <a:r>
+              <a:rPr lang="en-US" sz="1440" spc="200" kern="0" dirty="0">
+                <a:solidFill>
+                  <a:srgbClr val="5FE0C5"/>
+                </a:solidFill>
+                <a:latin typeface="Courier New" pitchFamily="34" charset="0"/>
+                <a:ea typeface="Courier New" pitchFamily="34" charset="-122"/>
+                <a:cs typeface="Courier New" pitchFamily="34" charset="-120"/>
+              </a:rPr>
+              <a:t>CREDITS &amp; THANKS</a:t>
+            </a:r>
+            <a:endParaRPr lang="en-US" sz="1440" dirty="0"/>
+          </a:p>
+        </p:txBody>
+      </p:sp>
+      <p:sp>
+        <p:nvSpPr>
+          <p:cNvPr id="19" name="Text 17"/>
+          <p:cNvSpPr/>
+          <p:nvPr/>
+        </p:nvSpPr>
+        <p:spPr>
+          <a:xfrm>
+            <a:off x="640080" y="457200"/>
+            <a:ext cx="10881360" cy="640080"/>
+          </a:xfrm>
+          <a:prstGeom prst="rect">
+            <a:avLst/>
+          </a:prstGeom>
+          <a:noFill/>
+          <a:ln/>
+        </p:spPr>
+        <p:txBody>
+          <a:bodyPr wrap="square" lIns="0" tIns="0" rIns="0" bIns="0" rtlCol="0" anchor="ctr"/>
+          <a:lstStyle/>
+          <a:p>
+            <a:pPr algn="l" indent="0" marL="0">
+              <a:buNone/>
+            </a:pPr>
+            <a:r>
+              <a:rPr lang="en-US" sz="3360" b="1" dirty="0">
+                <a:solidFill>
+                  <a:srgbClr val="F2A93B"/>
+                </a:solidFill>
+                <a:latin typeface="Courier New" pitchFamily="34" charset="0"/>
+                <a:ea typeface="Courier New" pitchFamily="34" charset="-122"/>
+                <a:cs typeface="Courier New" pitchFamily="34" charset="-120"/>
+              </a:rPr>
+              <a:t>This isn't my merit</a:t>
+            </a:r>
+            <a:endParaRPr lang="en-US" sz="3360" dirty="0"/>
+          </a:p>
+        </p:txBody>
+      </p:sp>
+      <p:sp>
+        <p:nvSpPr>
+          <p:cNvPr id="20" name="Text 18"/>
+          <p:cNvSpPr/>
+          <p:nvPr/>
+        </p:nvSpPr>
+        <p:spPr>
+          <a:xfrm>
+            <a:off x="640080" y="1371600"/>
+            <a:ext cx="10881360" cy="731520"/>
+          </a:xfrm>
+          <a:prstGeom prst="rect">
+            <a:avLst/>
+          </a:prstGeom>
+          <a:noFill/>
+          <a:ln/>
+        </p:spPr>
+        <p:txBody>
+          <a:bodyPr wrap="square" lIns="0" tIns="0" rIns="0" bIns="0" rtlCol="0" anchor="ctr"/>
+          <a:lstStyle/>
+          <a:p>
+            <a:pPr algn="ctr" indent="0" marL="0">
+              <a:lnSpc>
+                <a:spcPct val="120000"/>
+              </a:lnSpc>
+              <a:buNone/>
+            </a:pPr>
+            <a:r>
+              <a:rPr lang="en-US" sz="1920" dirty="0">
+                <a:solidFill>
+                  <a:srgbClr val="B8C0D0"/>
+                </a:solidFill>
+                <a:latin typeface="Calibri" pitchFamily="34" charset="0"/>
+                <a:ea typeface="Calibri" pitchFamily="34" charset="-122"/>
+                <a:cs typeface="Calibri" pitchFamily="34" charset="-120"/>
+              </a:rPr>
+              <a:t>Everything in this series is built on the work of open-source projects and their communities. I only learned from them and shared what I built.</a:t>
+            </a:r>
+            <a:endParaRPr lang="en-US" sz="1920" dirty="0"/>
+          </a:p>
+        </p:txBody>
+      </p:sp>
+      <p:sp>
+        <p:nvSpPr>
+          <p:cNvPr id="21" name="Shape 19"/>
+          <p:cNvSpPr/>
+          <p:nvPr/>
+        </p:nvSpPr>
+        <p:spPr>
+          <a:xfrm>
+            <a:off x="822960" y="2423160"/>
+            <a:ext cx="5029200" cy="2011680"/>
+          </a:xfrm>
+          <a:prstGeom prst="roundRect">
+            <a:avLst>
+              <a:gd name="adj" fmla="val 5455"/>
+            </a:avLst>
+          </a:prstGeom>
+          <a:solidFill>
+            <a:srgbClr val="121A2E"/>
+          </a:solidFill>
+          <a:ln w="19050">
+            <a:solidFill>
+              <a:srgbClr val="5FE0C5"/>
+            </a:solidFill>
+            <a:prstDash val="solid"/>
+          </a:ln>
+          <a:effectLst>
+            <a:outerShdw sx="100000" sy="100000" kx="0" ky="0" algn="bl" rotWithShape="0" blurRad="101600" dist="38100" dir="2700000">
+              <a:srgbClr val="000000">
+                <a:alpha val="25000"/>
+              </a:srgbClr>
+            </a:outerShdw>
+          </a:effectLst>
+        </p:spPr>
+      </p:sp>
+      <p:sp>
+        <p:nvSpPr>
+          <p:cNvPr id="22" name="Text 20"/>
+          <p:cNvSpPr/>
+          <p:nvPr/>
+        </p:nvSpPr>
+        <p:spPr>
+          <a:xfrm>
+            <a:off x="1143000" y="2697480"/>
+            <a:ext cx="4389120" cy="548640"/>
+          </a:xfrm>
+          <a:prstGeom prst="rect">
+            <a:avLst/>
+          </a:prstGeom>
+          <a:noFill/>
+          <a:ln/>
+        </p:spPr>
+        <p:txBody>
+          <a:bodyPr wrap="square" lIns="0" tIns="0" rIns="0" bIns="0" rtlCol="0" anchor="ctr"/>
+          <a:lstStyle/>
+          <a:p>
+            <a:pPr indent="0" marL="0">
+              <a:buNone/>
+            </a:pPr>
+            <a:r>
+              <a:rPr lang="en-US" sz="2640" b="1" dirty="0">
+                <a:solidFill>
+                  <a:srgbClr val="5FE0C5"/>
+                </a:solidFill>
+                <a:latin typeface="Courier New" pitchFamily="34" charset="0"/>
+                <a:ea typeface="Courier New" pitchFamily="34" charset="-122"/>
+                <a:cs typeface="Courier New" pitchFamily="34" charset="-120"/>
+              </a:rPr>
+              <a:t>Spring AI</a:t>
+            </a:r>
+            <a:endParaRPr lang="en-US" sz="2640" dirty="0"/>
+          </a:p>
+        </p:txBody>
+      </p:sp>
+      <p:sp>
+        <p:nvSpPr>
+          <p:cNvPr id="23" name="Text 21"/>
+          <p:cNvSpPr/>
+          <p:nvPr/>
+        </p:nvSpPr>
+        <p:spPr>
+          <a:xfrm>
+            <a:off x="1143000" y="3337560"/>
+            <a:ext cx="4389120" cy="457200"/>
+          </a:xfrm>
+          <a:prstGeom prst="rect">
+            <a:avLst/>
+          </a:prstGeom>
+          <a:noFill/>
+          <a:ln/>
+        </p:spPr>
+        <p:txBody>
+          <a:bodyPr wrap="square" lIns="0" tIns="0" rIns="0" bIns="0" rtlCol="0" anchor="ctr"/>
+          <a:lstStyle/>
+          <a:p>
+            <a:pPr indent="0" marL="0">
+              <a:buNone/>
+            </a:pPr>
+            <a:r>
+              <a:rPr lang="en-US" sz="1560" dirty="0">
+                <a:solidFill>
+                  <a:srgbClr val="E5E9F0"/>
+                </a:solidFill>
+                <a:latin typeface="Calibri" pitchFamily="34" charset="0"/>
+                <a:ea typeface="Calibri" pitchFamily="34" charset="-122"/>
+                <a:cs typeface="Calibri" pitchFamily="34" charset="-120"/>
+              </a:rPr>
+              <a:t>The AI integration layer for Spring</a:t>
+            </a:r>
+            <a:endParaRPr lang="en-US" sz="1560" dirty="0"/>
+          </a:p>
+        </p:txBody>
+      </p:sp>
+      <p:sp>
+        <p:nvSpPr>
+          <p:cNvPr id="24" name="Text 22"/>
+          <p:cNvSpPr/>
+          <p:nvPr/>
+        </p:nvSpPr>
+        <p:spPr>
+          <a:xfrm>
+            <a:off x="1143000" y="3840480"/>
+            <a:ext cx="4389120" cy="365760"/>
+          </a:xfrm>
+          <a:prstGeom prst="rect">
+            <a:avLst/>
+          </a:prstGeom>
+          <a:noFill/>
+          <a:ln/>
+        </p:spPr>
+        <p:txBody>
+          <a:bodyPr wrap="square" lIns="0" tIns="0" rIns="0" bIns="0" rtlCol="0" anchor="ctr"/>
+          <a:lstStyle/>
+          <a:p>
+            <a:pPr indent="0" marL="0">
+              <a:buNone/>
+            </a:pPr>
+            <a:r>
+              <a:rPr lang="en-US" sz="1440" dirty="0">
+                <a:solidFill>
+                  <a:srgbClr val="8B98AC"/>
+                </a:solidFill>
+                <a:latin typeface="Courier New" pitchFamily="34" charset="0"/>
+                <a:ea typeface="Courier New" pitchFamily="34" charset="-122"/>
+                <a:cs typeface="Courier New" pitchFamily="34" charset="-120"/>
+              </a:rPr>
+              <a:t>spring.io/projects/spring-ai</a:t>
+            </a:r>
+            <a:endParaRPr lang="en-US" sz="1440" dirty="0"/>
+          </a:p>
+        </p:txBody>
+      </p:sp>
+      <p:sp>
+        <p:nvSpPr>
+          <p:cNvPr id="25" name="Shape 23"/>
+          <p:cNvSpPr/>
+          <p:nvPr/>
+        </p:nvSpPr>
+        <p:spPr>
+          <a:xfrm>
+            <a:off x="6309360" y="2423160"/>
+            <a:ext cx="5029200" cy="2011680"/>
+          </a:xfrm>
+          <a:prstGeom prst="roundRect">
+            <a:avLst>
+              <a:gd name="adj" fmla="val 5455"/>
+            </a:avLst>
+          </a:prstGeom>
+          <a:solidFill>
+            <a:srgbClr val="121A2E"/>
+          </a:solidFill>
+          <a:ln w="19050">
+            <a:solidFill>
+              <a:srgbClr val="F2A93B"/>
+            </a:solidFill>
+            <a:prstDash val="solid"/>
+          </a:ln>
+          <a:effectLst>
+            <a:outerShdw sx="100000" sy="100000" kx="0" ky="0" algn="bl" rotWithShape="0" blurRad="101600" dist="38100" dir="2700000">
+              <a:srgbClr val="000000">
+                <a:alpha val="25000"/>
+              </a:srgbClr>
+            </a:outerShdw>
+          </a:effectLst>
+        </p:spPr>
+      </p:sp>
+      <p:sp>
+        <p:nvSpPr>
+          <p:cNvPr id="26" name="Text 24"/>
+          <p:cNvSpPr/>
+          <p:nvPr/>
+        </p:nvSpPr>
+        <p:spPr>
+          <a:xfrm>
+            <a:off x="6629400" y="2697480"/>
+            <a:ext cx="4389120" cy="548640"/>
+          </a:xfrm>
+          <a:prstGeom prst="rect">
+            <a:avLst/>
+          </a:prstGeom>
+          <a:noFill/>
+          <a:ln/>
+        </p:spPr>
+        <p:txBody>
+          <a:bodyPr wrap="square" lIns="0" tIns="0" rIns="0" bIns="0" rtlCol="0" anchor="ctr"/>
+          <a:lstStyle/>
+          <a:p>
+            <a:pPr indent="0" marL="0">
+              <a:buNone/>
+            </a:pPr>
+            <a:r>
+              <a:rPr lang="en-US" sz="2640" b="1" dirty="0">
+                <a:solidFill>
+                  <a:srgbClr val="F2A93B"/>
+                </a:solidFill>
+                <a:latin typeface="Courier New" pitchFamily="34" charset="0"/>
+                <a:ea typeface="Courier New" pitchFamily="34" charset="-122"/>
+                <a:cs typeface="Courier New" pitchFamily="34" charset="-120"/>
+              </a:rPr>
+              <a:t>Ollama</a:t>
+            </a:r>
+            <a:endParaRPr lang="en-US" sz="2640" dirty="0"/>
+          </a:p>
+        </p:txBody>
+      </p:sp>
+      <p:sp>
+        <p:nvSpPr>
+          <p:cNvPr id="27" name="Text 25"/>
+          <p:cNvSpPr/>
+          <p:nvPr/>
+        </p:nvSpPr>
+        <p:spPr>
+          <a:xfrm>
+            <a:off x="6629400" y="3337560"/>
+            <a:ext cx="4389120" cy="457200"/>
+          </a:xfrm>
+          <a:prstGeom prst="rect">
+            <a:avLst/>
+          </a:prstGeom>
+          <a:noFill/>
+          <a:ln/>
+        </p:spPr>
+        <p:txBody>
+          <a:bodyPr wrap="square" lIns="0" tIns="0" rIns="0" bIns="0" rtlCol="0" anchor="ctr"/>
+          <a:lstStyle/>
+          <a:p>
+            <a:pPr indent="0" marL="0">
+              <a:buNone/>
+            </a:pPr>
+            <a:r>
+              <a:rPr lang="en-US" sz="1560" dirty="0">
+                <a:solidFill>
+                  <a:srgbClr val="E5E9F0"/>
+                </a:solidFill>
+                <a:latin typeface="Calibri" pitchFamily="34" charset="0"/>
+                <a:ea typeface="Calibri" pitchFamily="34" charset="-122"/>
+                <a:cs typeface="Calibri" pitchFamily="34" charset="-120"/>
+              </a:rPr>
+              <a:t>Run open LLMs locally</a:t>
+            </a:r>
+            <a:endParaRPr lang="en-US" sz="1560" dirty="0"/>
+          </a:p>
+        </p:txBody>
+      </p:sp>
+      <p:sp>
+        <p:nvSpPr>
+          <p:cNvPr id="28" name="Text 26"/>
+          <p:cNvSpPr/>
+          <p:nvPr/>
+        </p:nvSpPr>
+        <p:spPr>
+          <a:xfrm>
+            <a:off x="6629400" y="3840480"/>
+            <a:ext cx="4389120" cy="365760"/>
+          </a:xfrm>
+          <a:prstGeom prst="rect">
+            <a:avLst/>
+          </a:prstGeom>
+          <a:noFill/>
+          <a:ln/>
+        </p:spPr>
+        <p:txBody>
+          <a:bodyPr wrap="square" lIns="0" tIns="0" rIns="0" bIns="0" rtlCol="0" anchor="ctr"/>
+          <a:lstStyle/>
+          <a:p>
+            <a:pPr indent="0" marL="0">
+              <a:buNone/>
+            </a:pPr>
+            <a:r>
+              <a:rPr lang="en-US" sz="1440" dirty="0">
+                <a:solidFill>
+                  <a:srgbClr val="8B98AC"/>
+                </a:solidFill>
+                <a:latin typeface="Courier New" pitchFamily="34" charset="0"/>
+                <a:ea typeface="Courier New" pitchFamily="34" charset="-122"/>
+                <a:cs typeface="Courier New" pitchFamily="34" charset="-120"/>
+              </a:rPr>
+              <a:t>ollama.com</a:t>
+            </a:r>
+            <a:endParaRPr lang="en-US" sz="1440" dirty="0"/>
+          </a:p>
+        </p:txBody>
+      </p:sp>
+      <p:sp>
+        <p:nvSpPr>
+          <p:cNvPr id="29" name="Shape 27"/>
+          <p:cNvSpPr/>
+          <p:nvPr/>
+        </p:nvSpPr>
+        <p:spPr>
+          <a:xfrm>
+            <a:off x="4251960" y="4892040"/>
+            <a:ext cx="3657600" cy="0"/>
+          </a:xfrm>
+          <a:prstGeom prst="line">
+            <a:avLst/>
+          </a:prstGeom>
+          <a:noFill/>
+          <a:ln w="12700">
+            <a:solidFill>
+              <a:srgbClr val="5B6478">
+                <a:alpha val="70000"/>
+              </a:srgbClr>
+            </a:solidFill>
+            <a:prstDash val="solid"/>
+          </a:ln>
+        </p:spPr>
+      </p:sp>
+      <p:sp>
+        <p:nvSpPr>
+          <p:cNvPr id="30" name="Shape 28"/>
+          <p:cNvSpPr/>
+          <p:nvPr/>
+        </p:nvSpPr>
+        <p:spPr>
+          <a:xfrm>
+            <a:off x="4210812" y="4850892"/>
+            <a:ext cx="82296" cy="82296"/>
+          </a:xfrm>
+          <a:prstGeom prst="ellipse">
+            <a:avLst/>
+          </a:prstGeom>
+          <a:solidFill>
+            <a:srgbClr val="0A0F1C"/>
+          </a:solidFill>
+          <a:ln w="19050">
+            <a:solidFill>
+              <a:srgbClr val="F2A93B"/>
+            </a:solidFill>
+            <a:prstDash val="solid"/>
+          </a:ln>
+        </p:spPr>
+      </p:sp>
+      <p:sp>
+        <p:nvSpPr>
+          <p:cNvPr id="31" name="Shape 29"/>
+          <p:cNvSpPr/>
+          <p:nvPr/>
+        </p:nvSpPr>
+        <p:spPr>
+          <a:xfrm>
+            <a:off x="6039612" y="4850892"/>
+            <a:ext cx="82296" cy="82296"/>
+          </a:xfrm>
+          <a:prstGeom prst="ellipse">
+            <a:avLst/>
+          </a:prstGeom>
+          <a:solidFill>
+            <a:srgbClr val="0A0F1C"/>
+          </a:solidFill>
+          <a:ln w="19050">
+            <a:solidFill>
+              <a:srgbClr val="8B98AC"/>
+            </a:solidFill>
+            <a:prstDash val="solid"/>
+          </a:ln>
+        </p:spPr>
+      </p:sp>
+      <p:sp>
+        <p:nvSpPr>
+          <p:cNvPr id="32" name="Shape 30"/>
+          <p:cNvSpPr/>
+          <p:nvPr/>
+        </p:nvSpPr>
+        <p:spPr>
+          <a:xfrm>
+            <a:off x="7868412" y="4850892"/>
+            <a:ext cx="82296" cy="82296"/>
+          </a:xfrm>
+          <a:prstGeom prst="ellipse">
+            <a:avLst/>
+          </a:prstGeom>
+          <a:solidFill>
+            <a:srgbClr val="0A0F1C"/>
+          </a:solidFill>
+          <a:ln w="19050">
+            <a:solidFill>
+              <a:srgbClr val="5FE0C5"/>
+            </a:solidFill>
+            <a:prstDash val="solid"/>
+          </a:ln>
+        </p:spPr>
+      </p:sp>
+      <p:sp>
+        <p:nvSpPr>
+          <p:cNvPr id="33" name="Text 31"/>
+          <p:cNvSpPr/>
+          <p:nvPr/>
+        </p:nvSpPr>
+        <p:spPr>
+          <a:xfrm>
+            <a:off x="0" y="5120640"/>
+            <a:ext cx="12161520" cy="457200"/>
+          </a:xfrm>
+          <a:prstGeom prst="rect">
+            <a:avLst/>
+          </a:prstGeom>
+          <a:noFill/>
+          <a:ln/>
+        </p:spPr>
+        <p:txBody>
+          <a:bodyPr wrap="square" lIns="0" tIns="0" rIns="0" bIns="0" rtlCol="0" anchor="ctr"/>
+          <a:lstStyle/>
+          <a:p>
+            <a:pPr algn="ctr" indent="0" marL="0">
+              <a:buNone/>
+            </a:pPr>
+            <a:r>
+              <a:rPr lang="en-US" sz="1680" dirty="0">
+                <a:solidFill>
+                  <a:srgbClr val="E5E9F0"/>
+                </a:solidFill>
+                <a:latin typeface="Calibri" pitchFamily="34" charset="0"/>
+                <a:ea typeface="Calibri" pitchFamily="34" charset="-122"/>
+                <a:cs typeface="Calibri" pitchFamily="34" charset="-120"/>
+              </a:rPr>
+              <a:t>Shared with gratitude — all credit to their maintainers &amp; contributors.</a:t>
+            </a:r>
+            <a:endParaRPr lang="en-US" sz="1680" dirty="0"/>
+          </a:p>
+        </p:txBody>
+      </p:sp>
+      <p:sp>
+        <p:nvSpPr>
+          <p:cNvPr id="34" name="Text 32"/>
+          <p:cNvSpPr/>
+          <p:nvPr/>
+        </p:nvSpPr>
+        <p:spPr>
+          <a:xfrm>
+            <a:off x="0" y="5623560"/>
+            <a:ext cx="12161520" cy="365760"/>
+          </a:xfrm>
+          <a:prstGeom prst="rect">
+            <a:avLst/>
+          </a:prstGeom>
+          <a:noFill/>
+          <a:ln/>
+        </p:spPr>
+        <p:txBody>
+          <a:bodyPr wrap="square" lIns="0" tIns="0" rIns="0" bIns="0" rtlCol="0" anchor="ctr"/>
+          <a:lstStyle/>
+          <a:p>
+            <a:pPr algn="ctr" indent="0" marL="0">
+              <a:buNone/>
+            </a:pPr>
+            <a:r>
+              <a:rPr lang="en-US" sz="1440" dirty="0">
+                <a:solidFill>
+                  <a:srgbClr val="8B98AC"/>
+                </a:solidFill>
+                <a:latin typeface="Courier New" pitchFamily="34" charset="0"/>
+                <a:ea typeface="Courier New" pitchFamily="34" charset="-122"/>
+                <a:cs typeface="Courier New" pitchFamily="34" charset="-120"/>
+              </a:rPr>
+              <a:t>github.com/balajich/spring-ai-with-llama</a:t>
+            </a:r>
+            <a:endParaRPr lang="en-US" sz="1440" dirty="0"/>
           </a:p>
         </p:txBody>
       </p:sp>
@@ -2732,7 +3857,7 @@
                 <a:ea typeface="Courier New" pitchFamily="34" charset="-122"/>
                 <a:cs typeface="Courier New" pitchFamily="34" charset="-120"/>
               </a:rPr>
-              <a:t>2 / 9</a:t>
+              <a:t>2 / 10</a:t>
             </a:r>
             <a:endParaRPr lang="en-US" sz="1080" dirty="0"/>
           </a:p>
@@ -3532,7 +4657,7 @@
                 <a:ea typeface="Courier New" pitchFamily="34" charset="-122"/>
                 <a:cs typeface="Courier New" pitchFamily="34" charset="-120"/>
               </a:rPr>
-              <a:t>3 / 9</a:t>
+              <a:t>3 / 10</a:t>
             </a:r>
             <a:endParaRPr lang="en-US" sz="1080" dirty="0"/>
           </a:p>
@@ -4648,7 +5773,7 @@
                 <a:ea typeface="Courier New" pitchFamily="34" charset="-122"/>
                 <a:cs typeface="Courier New" pitchFamily="34" charset="-120"/>
               </a:rPr>
-              <a:t>4 / 9</a:t>
+              <a:t>4 / 10</a:t>
             </a:r>
             <a:endParaRPr lang="en-US" sz="1080" dirty="0"/>
           </a:p>
@@ -5896,7 +7021,7 @@
                 <a:ea typeface="Courier New" pitchFamily="34" charset="-122"/>
                 <a:cs typeface="Courier New" pitchFamily="34" charset="-120"/>
               </a:rPr>
-              <a:t>5 / 9</a:t>
+              <a:t>5 / 10</a:t>
             </a:r>
             <a:endParaRPr lang="en-US" sz="1080" dirty="0"/>
           </a:p>
@@ -7204,7 +8329,7 @@
                 <a:ea typeface="Courier New" pitchFamily="34" charset="-122"/>
                 <a:cs typeface="Courier New" pitchFamily="34" charset="-120"/>
               </a:rPr>
-              <a:t>6 / 9</a:t>
+              <a:t>6 / 10</a:t>
             </a:r>
             <a:endParaRPr lang="en-US" sz="1080" dirty="0"/>
           </a:p>
@@ -8387,7 +9512,7 @@
                 <a:ea typeface="Courier New" pitchFamily="34" charset="-122"/>
                 <a:cs typeface="Courier New" pitchFamily="34" charset="-120"/>
               </a:rPr>
-              <a:t>7 / 9</a:t>
+              <a:t>7 / 10</a:t>
             </a:r>
             <a:endParaRPr lang="en-US" sz="1080" dirty="0"/>
           </a:p>
@@ -10097,7 +11222,7 @@
                 <a:ea typeface="Courier New" pitchFamily="34" charset="-122"/>
                 <a:cs typeface="Courier New" pitchFamily="34" charset="-120"/>
               </a:rPr>
-              <a:t>8 / 9</a:t>
+              <a:t>8 / 10</a:t>
             </a:r>
             <a:endParaRPr lang="en-US" sz="1080" dirty="0"/>
           </a:p>
@@ -10872,7 +11997,7 @@
                 <a:ea typeface="Courier New" pitchFamily="34" charset="-122"/>
                 <a:cs typeface="Courier New" pitchFamily="34" charset="-120"/>
               </a:rPr>
-              <a:t>9 / 9</a:t>
+              <a:t>9 / 10</a:t>
             </a:r>
             <a:endParaRPr lang="en-US" sz="1080" dirty="0"/>
           </a:p>
@@ -10911,7 +12036,7 @@
                 <a:ea typeface="Courier New" pitchFamily="34" charset="-122"/>
                 <a:cs typeface="Courier New" pitchFamily="34" charset="-120"/>
               </a:rPr>
-              <a:t>CREDITS &amp; THANKS</a:t>
+              <a:t>ENJOYING THIS?</a:t>
             </a:r>
             <a:endParaRPr lang="en-US" sz="1440" dirty="0"/>
           </a:p>
@@ -10938,7 +12063,7 @@
           <a:bodyPr wrap="square" lIns="0" tIns="0" rIns="0" bIns="0" rtlCol="0" anchor="ctr"/>
           <a:lstStyle/>
           <a:p>
-            <a:pPr algn="l" indent="0" marL="0">
+            <a:pPr algn="ctr" indent="0" marL="0">
               <a:buNone/>
             </a:pPr>
             <a:r>
@@ -10950,7 +12075,7 @@
                 <a:ea typeface="Courier New" pitchFamily="34" charset="-122"/>
                 <a:cs typeface="Courier New" pitchFamily="34" charset="-120"/>
               </a:rPr>
-              <a:t>This isn't my merit</a:t>
+              <a:t>Like &amp; Subscribe</a:t>
             </a:r>
             <a:endParaRPr lang="en-US" sz="3360" dirty="0"/>
           </a:p>
@@ -10964,8 +12089,8 @@
         </p:nvSpPr>
         <p:spPr>
           <a:xfrm>
-            <a:off x="640080" y="1371600"/>
-            <a:ext cx="10881360" cy="731520"/>
+            <a:off x="640080" y="1417320"/>
+            <a:ext cx="10881360" cy="548640"/>
           </a:xfrm>
           <a:prstGeom prst="rect">
             <a:avLst/>
@@ -10978,13 +12103,10 @@
           <a:lstStyle/>
           <a:p>
             <a:pPr algn="ctr" indent="0" marL="0">
-              <a:lnSpc>
-                <a:spcPct val="120000"/>
-              </a:lnSpc>
-              <a:buNone/>
-            </a:pPr>
-            <a:r>
-              <a:rPr lang="en-US" sz="1920" dirty="0">
+              <a:buNone/>
+            </a:pPr>
+            <a:r>
+              <a:rPr lang="en-US" sz="2040" dirty="0">
                 <a:solidFill>
                   <a:srgbClr val="B8C0D0"/>
                 </a:solidFill>
@@ -10992,9 +12114,9 @@
                 <a:ea typeface="Calibri" pitchFamily="34" charset="-122"/>
                 <a:cs typeface="Calibri" pitchFamily="34" charset="-120"/>
               </a:rPr>
-              <a:t>Everything in this series is built on the work of open-source projects and their communities. I only learned from them and shared what I built.</a:t>
-            </a:r>
-            <a:endParaRPr lang="en-US" sz="1920" dirty="0"/>
+              <a:t>If this helped, a like and a subscribe genuinely help the series reach more developers.</a:t>
+            </a:r>
+            <a:endParaRPr lang="en-US" sz="2040" dirty="0"/>
           </a:p>
         </p:txBody>
       </p:sp>
@@ -11006,12 +12128,166 @@
         </p:nvSpPr>
         <p:spPr>
           <a:xfrm>
-            <a:off x="822960" y="2423160"/>
-            <a:ext cx="5029200" cy="2011680"/>
+            <a:off x="822960" y="2286000"/>
+            <a:ext cx="3200400" cy="2148840"/>
           </a:xfrm>
           <a:prstGeom prst="roundRect">
             <a:avLst>
-              <a:gd name="adj" fmla="val 5455"/>
+              <a:gd name="adj" fmla="val 5957"/>
+            </a:avLst>
+          </a:prstGeom>
+          <a:solidFill>
+            <a:srgbClr val="121A2E"/>
+          </a:solidFill>
+          <a:ln w="19050">
+            <a:solidFill>
+              <a:srgbClr val="F2A93B"/>
+            </a:solidFill>
+            <a:prstDash val="solid"/>
+          </a:ln>
+          <a:effectLst>
+            <a:outerShdw sx="100000" sy="100000" kx="0" ky="0" algn="bl" rotWithShape="0" blurRad="101600" dist="38100" dir="2700000">
+              <a:srgbClr val="000000">
+                <a:alpha val="25000"/>
+              </a:srgbClr>
+            </a:outerShdw>
+          </a:effectLst>
+        </p:spPr>
+      </p:sp>
+      <p:sp>
+        <p:nvSpPr>
+          <p:cNvPr id="22" name="Text 20"/>
+          <p:cNvSpPr/>
+          <p:nvPr/>
+        </p:nvSpPr>
+        <p:spPr>
+          <a:xfrm>
+            <a:off x="822960" y="2542032"/>
+            <a:ext cx="3200400" cy="731520"/>
+          </a:xfrm>
+          <a:prstGeom prst="rect">
+            <a:avLst/>
+          </a:prstGeom>
+          <a:noFill/>
+          <a:ln/>
+        </p:spPr>
+        <p:txBody>
+          <a:bodyPr wrap="square" lIns="0" tIns="0" rIns="0" bIns="0" rtlCol="0" anchor="ctr"/>
+          <a:lstStyle/>
+          <a:p>
+            <a:pPr algn="ctr" indent="0" marL="0">
+              <a:buNone/>
+            </a:pPr>
+            <a:r>
+              <a:rPr lang="en-US" sz="4400" dirty="0">
+                <a:solidFill>
+                  <a:srgbClr val="F2A93B"/>
+                </a:solidFill>
+                <a:latin typeface="Calibri" pitchFamily="34" charset="0"/>
+                <a:ea typeface="Calibri" pitchFamily="34" charset="-122"/>
+                <a:cs typeface="Calibri" pitchFamily="34" charset="-120"/>
+              </a:rPr>
+              <a:t>👍</a:t>
+            </a:r>
+            <a:endParaRPr lang="en-US" sz="4400" dirty="0"/>
+          </a:p>
+        </p:txBody>
+      </p:sp>
+      <p:sp>
+        <p:nvSpPr>
+          <p:cNvPr id="23" name="Text 21"/>
+          <p:cNvSpPr/>
+          <p:nvPr/>
+        </p:nvSpPr>
+        <p:spPr>
+          <a:xfrm>
+            <a:off x="822960" y="3310128"/>
+            <a:ext cx="3200400" cy="457200"/>
+          </a:xfrm>
+          <a:prstGeom prst="rect">
+            <a:avLst/>
+          </a:prstGeom>
+          <a:noFill/>
+          <a:ln/>
+        </p:spPr>
+        <p:txBody>
+          <a:bodyPr wrap="square" lIns="0" tIns="0" rIns="0" bIns="0" rtlCol="0" anchor="ctr"/>
+          <a:lstStyle/>
+          <a:p>
+            <a:pPr algn="ctr" indent="0" marL="0">
+              <a:buNone/>
+            </a:pPr>
+            <a:r>
+              <a:rPr lang="en-US" sz="2280" b="1" dirty="0">
+                <a:solidFill>
+                  <a:srgbClr val="F2A93B"/>
+                </a:solidFill>
+                <a:latin typeface="Courier New" pitchFamily="34" charset="0"/>
+                <a:ea typeface="Courier New" pitchFamily="34" charset="-122"/>
+                <a:cs typeface="Courier New" pitchFamily="34" charset="-120"/>
+              </a:rPr>
+              <a:t>Like</a:t>
+            </a:r>
+            <a:endParaRPr lang="en-US" sz="2280" dirty="0"/>
+          </a:p>
+        </p:txBody>
+      </p:sp>
+      <p:sp>
+        <p:nvSpPr>
+          <p:cNvPr id="24" name="Text 22"/>
+          <p:cNvSpPr/>
+          <p:nvPr/>
+        </p:nvSpPr>
+        <p:spPr>
+          <a:xfrm>
+            <a:off x="1051560" y="3767328"/>
+            <a:ext cx="2743200" cy="594360"/>
+          </a:xfrm>
+          <a:prstGeom prst="rect">
+            <a:avLst/>
+          </a:prstGeom>
+          <a:noFill/>
+          <a:ln/>
+        </p:spPr>
+        <p:txBody>
+          <a:bodyPr wrap="square" lIns="0" tIns="0" rIns="0" bIns="0" rtlCol="0" anchor="t"/>
+          <a:lstStyle/>
+          <a:p>
+            <a:pPr algn="ctr" indent="0" marL="0">
+              <a:lnSpc>
+                <a:spcPct val="110000"/>
+              </a:lnSpc>
+              <a:buNone/>
+            </a:pPr>
+            <a:r>
+              <a:rPr lang="en-US" sz="1440" dirty="0">
+                <a:solidFill>
+                  <a:srgbClr val="E5E9F0"/>
+                </a:solidFill>
+                <a:latin typeface="Calibri" pitchFamily="34" charset="0"/>
+                <a:ea typeface="Calibri" pitchFamily="34" charset="-122"/>
+                <a:cs typeface="Calibri" pitchFamily="34" charset="-120"/>
+              </a:rPr>
+              <a:t>Tap like if this made Spring AI click.</a:t>
+            </a:r>
+            <a:endParaRPr lang="en-US" sz="1440" dirty="0"/>
+          </a:p>
+        </p:txBody>
+      </p:sp>
+      <p:sp>
+        <p:nvSpPr>
+          <p:cNvPr id="25" name="Shape 23"/>
+          <p:cNvSpPr/>
+          <p:nvPr/>
+        </p:nvSpPr>
+        <p:spPr>
+          <a:xfrm>
+            <a:off x="4480560" y="2286000"/>
+            <a:ext cx="3200400" cy="2148840"/>
+          </a:xfrm>
+          <a:prstGeom prst="roundRect">
+            <a:avLst>
+              <a:gd name="adj" fmla="val 5957"/>
             </a:avLst>
           </a:prstGeom>
           <a:solidFill>
@@ -11034,14 +12310,14 @@
       </p:sp>
       <p:sp>
         <p:nvSpPr>
-          <p:cNvPr id="22" name="Text 20"/>
-          <p:cNvSpPr/>
-          <p:nvPr/>
-        </p:nvSpPr>
-        <p:spPr>
-          <a:xfrm>
-            <a:off x="1143000" y="2697480"/>
-            <a:ext cx="4389120" cy="548640"/>
+          <p:cNvPr id="26" name="Text 24"/>
+          <p:cNvSpPr/>
+          <p:nvPr/>
+        </p:nvSpPr>
+        <p:spPr>
+          <a:xfrm>
+            <a:off x="4480560" y="2542032"/>
+            <a:ext cx="3200400" cy="731520"/>
           </a:xfrm>
           <a:prstGeom prst="rect">
             <a:avLst/>
@@ -11053,73 +12329,34 @@
           <a:bodyPr wrap="square" lIns="0" tIns="0" rIns="0" bIns="0" rtlCol="0" anchor="ctr"/>
           <a:lstStyle/>
           <a:p>
-            <a:pPr indent="0" marL="0">
-              <a:buNone/>
-            </a:pPr>
-            <a:r>
-              <a:rPr lang="en-US" sz="2640" b="1" dirty="0">
+            <a:pPr algn="ctr" indent="0" marL="0">
+              <a:buNone/>
+            </a:pPr>
+            <a:r>
+              <a:rPr lang="en-US" sz="4400" dirty="0">
                 <a:solidFill>
                   <a:srgbClr val="5FE0C5"/>
-                </a:solidFill>
-                <a:latin typeface="Courier New" pitchFamily="34" charset="0"/>
-                <a:ea typeface="Courier New" pitchFamily="34" charset="-122"/>
-                <a:cs typeface="Courier New" pitchFamily="34" charset="-120"/>
-              </a:rPr>
-              <a:t>Spring AI</a:t>
-            </a:r>
-            <a:endParaRPr lang="en-US" sz="2640" dirty="0"/>
-          </a:p>
-        </p:txBody>
-      </p:sp>
-      <p:sp>
-        <p:nvSpPr>
-          <p:cNvPr id="23" name="Text 21"/>
-          <p:cNvSpPr/>
-          <p:nvPr/>
-        </p:nvSpPr>
-        <p:spPr>
-          <a:xfrm>
-            <a:off x="1143000" y="3337560"/>
-            <a:ext cx="4389120" cy="457200"/>
-          </a:xfrm>
-          <a:prstGeom prst="rect">
-            <a:avLst/>
-          </a:prstGeom>
-          <a:noFill/>
-          <a:ln/>
-        </p:spPr>
-        <p:txBody>
-          <a:bodyPr wrap="square" lIns="0" tIns="0" rIns="0" bIns="0" rtlCol="0" anchor="ctr"/>
-          <a:lstStyle/>
-          <a:p>
-            <a:pPr indent="0" marL="0">
-              <a:buNone/>
-            </a:pPr>
-            <a:r>
-              <a:rPr lang="en-US" sz="1560" dirty="0">
-                <a:solidFill>
-                  <a:srgbClr val="E5E9F0"/>
                 </a:solidFill>
                 <a:latin typeface="Calibri" pitchFamily="34" charset="0"/>
                 <a:ea typeface="Calibri" pitchFamily="34" charset="-122"/>
                 <a:cs typeface="Calibri" pitchFamily="34" charset="-120"/>
               </a:rPr>
-              <a:t>The AI integration layer for Spring</a:t>
-            </a:r>
-            <a:endParaRPr lang="en-US" sz="1560" dirty="0"/>
-          </a:p>
-        </p:txBody>
-      </p:sp>
-      <p:sp>
-        <p:nvSpPr>
-          <p:cNvPr id="24" name="Text 22"/>
-          <p:cNvSpPr/>
-          <p:nvPr/>
-        </p:nvSpPr>
-        <p:spPr>
-          <a:xfrm>
-            <a:off x="1143000" y="3840480"/>
-            <a:ext cx="4389120" cy="365760"/>
+              <a:t>🔔</a:t>
+            </a:r>
+            <a:endParaRPr lang="en-US" sz="4400" dirty="0"/>
+          </a:p>
+        </p:txBody>
+      </p:sp>
+      <p:sp>
+        <p:nvSpPr>
+          <p:cNvPr id="27" name="Text 25"/>
+          <p:cNvSpPr/>
+          <p:nvPr/>
+        </p:nvSpPr>
+        <p:spPr>
+          <a:xfrm>
+            <a:off x="4480560" y="3310128"/>
+            <a:ext cx="3200400" cy="457200"/>
           </a:xfrm>
           <a:prstGeom prst="rect">
             <a:avLst/>
@@ -11131,19 +12368,61 @@
           <a:bodyPr wrap="square" lIns="0" tIns="0" rIns="0" bIns="0" rtlCol="0" anchor="ctr"/>
           <a:lstStyle/>
           <a:p>
-            <a:pPr indent="0" marL="0">
+            <a:pPr algn="ctr" indent="0" marL="0">
+              <a:buNone/>
+            </a:pPr>
+            <a:r>
+              <a:rPr lang="en-US" sz="2280" b="1" dirty="0">
+                <a:solidFill>
+                  <a:srgbClr val="5FE0C5"/>
+                </a:solidFill>
+                <a:latin typeface="Courier New" pitchFamily="34" charset="0"/>
+                <a:ea typeface="Courier New" pitchFamily="34" charset="-122"/>
+                <a:cs typeface="Courier New" pitchFamily="34" charset="-120"/>
+              </a:rPr>
+              <a:t>Subscribe</a:t>
+            </a:r>
+            <a:endParaRPr lang="en-US" sz="2280" dirty="0"/>
+          </a:p>
+        </p:txBody>
+      </p:sp>
+      <p:sp>
+        <p:nvSpPr>
+          <p:cNvPr id="28" name="Text 26"/>
+          <p:cNvSpPr/>
+          <p:nvPr/>
+        </p:nvSpPr>
+        <p:spPr>
+          <a:xfrm>
+            <a:off x="4709160" y="3767328"/>
+            <a:ext cx="2743200" cy="594360"/>
+          </a:xfrm>
+          <a:prstGeom prst="rect">
+            <a:avLst/>
+          </a:prstGeom>
+          <a:noFill/>
+          <a:ln/>
+        </p:spPr>
+        <p:txBody>
+          <a:bodyPr wrap="square" lIns="0" tIns="0" rIns="0" bIns="0" rtlCol="0" anchor="t"/>
+          <a:lstStyle/>
+          <a:p>
+            <a:pPr algn="ctr" indent="0" marL="0">
+              <a:lnSpc>
+                <a:spcPct val="110000"/>
+              </a:lnSpc>
               <a:buNone/>
             </a:pPr>
             <a:r>
               <a:rPr lang="en-US" sz="1440" dirty="0">
                 <a:solidFill>
-                  <a:srgbClr val="8B98AC"/>
-                </a:solidFill>
-                <a:latin typeface="Courier New" pitchFamily="34" charset="0"/>
-                <a:ea typeface="Courier New" pitchFamily="34" charset="-122"/>
-                <a:cs typeface="Courier New" pitchFamily="34" charset="-120"/>
-              </a:rPr>
-              <a:t>spring.io/projects/spring-ai</a:t>
+                  <a:srgbClr val="E5E9F0"/>
+                </a:solidFill>
+                <a:latin typeface="Calibri" pitchFamily="34" charset="0"/>
+                <a:ea typeface="Calibri" pitchFamily="34" charset="-122"/>
+                <a:cs typeface="Calibri" pitchFamily="34" charset="-120"/>
+              </a:rPr>
+              <a:t>Subscribe + bell for every new chapter.</a:t>
             </a:r>
             <a:endParaRPr lang="en-US" sz="1440" dirty="0"/>
           </a:p>
@@ -11151,18 +12430,18 @@
       </p:sp>
       <p:sp>
         <p:nvSpPr>
-          <p:cNvPr id="25" name="Shape 23"/>
-          <p:cNvSpPr/>
-          <p:nvPr/>
-        </p:nvSpPr>
-        <p:spPr>
-          <a:xfrm>
-            <a:off x="6309360" y="2423160"/>
-            <a:ext cx="5029200" cy="2011680"/>
+          <p:cNvPr id="29" name="Shape 27"/>
+          <p:cNvSpPr/>
+          <p:nvPr/>
+        </p:nvSpPr>
+        <p:spPr>
+          <a:xfrm>
+            <a:off x="8138160" y="2286000"/>
+            <a:ext cx="3200400" cy="2148840"/>
           </a:xfrm>
           <a:prstGeom prst="roundRect">
             <a:avLst>
-              <a:gd name="adj" fmla="val 5455"/>
+              <a:gd name="adj" fmla="val 5957"/>
             </a:avLst>
           </a:prstGeom>
           <a:solidFill>
@@ -11170,7 +12449,7 @@
           </a:solidFill>
           <a:ln w="19050">
             <a:solidFill>
-              <a:srgbClr val="F2A93B"/>
+              <a:srgbClr val="8B98AC"/>
             </a:solidFill>
             <a:prstDash val="solid"/>
           </a:ln>
@@ -11185,14 +12464,14 @@
       </p:sp>
       <p:sp>
         <p:nvSpPr>
-          <p:cNvPr id="26" name="Text 24"/>
-          <p:cNvSpPr/>
-          <p:nvPr/>
-        </p:nvSpPr>
-        <p:spPr>
-          <a:xfrm>
-            <a:off x="6629400" y="2697480"/>
-            <a:ext cx="4389120" cy="548640"/>
+          <p:cNvPr id="30" name="Text 28"/>
+          <p:cNvSpPr/>
+          <p:nvPr/>
+        </p:nvSpPr>
+        <p:spPr>
+          <a:xfrm>
+            <a:off x="8138160" y="2542032"/>
+            <a:ext cx="3200400" cy="731520"/>
           </a:xfrm>
           <a:prstGeom prst="rect">
             <a:avLst/>
@@ -11204,73 +12483,34 @@
           <a:bodyPr wrap="square" lIns="0" tIns="0" rIns="0" bIns="0" rtlCol="0" anchor="ctr"/>
           <a:lstStyle/>
           <a:p>
-            <a:pPr indent="0" marL="0">
-              <a:buNone/>
-            </a:pPr>
-            <a:r>
-              <a:rPr lang="en-US" sz="2640" b="1" dirty="0">
-                <a:solidFill>
-                  <a:srgbClr val="F2A93B"/>
-                </a:solidFill>
-                <a:latin typeface="Courier New" pitchFamily="34" charset="0"/>
-                <a:ea typeface="Courier New" pitchFamily="34" charset="-122"/>
-                <a:cs typeface="Courier New" pitchFamily="34" charset="-120"/>
-              </a:rPr>
-              <a:t>Ollama</a:t>
-            </a:r>
-            <a:endParaRPr lang="en-US" sz="2640" dirty="0"/>
-          </a:p>
-        </p:txBody>
-      </p:sp>
-      <p:sp>
-        <p:nvSpPr>
-          <p:cNvPr id="27" name="Text 25"/>
-          <p:cNvSpPr/>
-          <p:nvPr/>
-        </p:nvSpPr>
-        <p:spPr>
-          <a:xfrm>
-            <a:off x="6629400" y="3337560"/>
-            <a:ext cx="4389120" cy="457200"/>
-          </a:xfrm>
-          <a:prstGeom prst="rect">
-            <a:avLst/>
-          </a:prstGeom>
-          <a:noFill/>
-          <a:ln/>
-        </p:spPr>
-        <p:txBody>
-          <a:bodyPr wrap="square" lIns="0" tIns="0" rIns="0" bIns="0" rtlCol="0" anchor="ctr"/>
-          <a:lstStyle/>
-          <a:p>
-            <a:pPr indent="0" marL="0">
-              <a:buNone/>
-            </a:pPr>
-            <a:r>
-              <a:rPr lang="en-US" sz="1560" dirty="0">
-                <a:solidFill>
-                  <a:srgbClr val="E5E9F0"/>
+            <a:pPr algn="ctr" indent="0" marL="0">
+              <a:buNone/>
+            </a:pPr>
+            <a:r>
+              <a:rPr lang="en-US" sz="4400" dirty="0">
+                <a:solidFill>
+                  <a:srgbClr val="8B98AC"/>
                 </a:solidFill>
                 <a:latin typeface="Calibri" pitchFamily="34" charset="0"/>
                 <a:ea typeface="Calibri" pitchFamily="34" charset="-122"/>
                 <a:cs typeface="Calibri" pitchFamily="34" charset="-120"/>
               </a:rPr>
-              <a:t>Run open LLMs locally</a:t>
-            </a:r>
-            <a:endParaRPr lang="en-US" sz="1560" dirty="0"/>
-          </a:p>
-        </p:txBody>
-      </p:sp>
-      <p:sp>
-        <p:nvSpPr>
-          <p:cNvPr id="28" name="Text 26"/>
-          <p:cNvSpPr/>
-          <p:nvPr/>
-        </p:nvSpPr>
-        <p:spPr>
-          <a:xfrm>
-            <a:off x="6629400" y="3840480"/>
-            <a:ext cx="4389120" cy="365760"/>
+              <a:t>💬</a:t>
+            </a:r>
+            <a:endParaRPr lang="en-US" sz="4400" dirty="0"/>
+          </a:p>
+        </p:txBody>
+      </p:sp>
+      <p:sp>
+        <p:nvSpPr>
+          <p:cNvPr id="31" name="Text 29"/>
+          <p:cNvSpPr/>
+          <p:nvPr/>
+        </p:nvSpPr>
+        <p:spPr>
+          <a:xfrm>
+            <a:off x="8138160" y="3310128"/>
+            <a:ext cx="3200400" cy="457200"/>
           </a:xfrm>
           <a:prstGeom prst="rect">
             <a:avLst/>
@@ -11282,19 +12522,61 @@
           <a:bodyPr wrap="square" lIns="0" tIns="0" rIns="0" bIns="0" rtlCol="0" anchor="ctr"/>
           <a:lstStyle/>
           <a:p>
-            <a:pPr indent="0" marL="0">
+            <a:pPr algn="ctr" indent="0" marL="0">
+              <a:buNone/>
+            </a:pPr>
+            <a:r>
+              <a:rPr lang="en-US" sz="2280" b="1" dirty="0">
+                <a:solidFill>
+                  <a:srgbClr val="8B98AC"/>
+                </a:solidFill>
+                <a:latin typeface="Courier New" pitchFamily="34" charset="0"/>
+                <a:ea typeface="Courier New" pitchFamily="34" charset="-122"/>
+                <a:cs typeface="Courier New" pitchFamily="34" charset="-120"/>
+              </a:rPr>
+              <a:t>Comment</a:t>
+            </a:r>
+            <a:endParaRPr lang="en-US" sz="2280" dirty="0"/>
+          </a:p>
+        </p:txBody>
+      </p:sp>
+      <p:sp>
+        <p:nvSpPr>
+          <p:cNvPr id="32" name="Text 30"/>
+          <p:cNvSpPr/>
+          <p:nvPr/>
+        </p:nvSpPr>
+        <p:spPr>
+          <a:xfrm>
+            <a:off x="8366760" y="3767328"/>
+            <a:ext cx="2743200" cy="594360"/>
+          </a:xfrm>
+          <a:prstGeom prst="rect">
+            <a:avLst/>
+          </a:prstGeom>
+          <a:noFill/>
+          <a:ln/>
+        </p:spPr>
+        <p:txBody>
+          <a:bodyPr wrap="square" lIns="0" tIns="0" rIns="0" bIns="0" rtlCol="0" anchor="t"/>
+          <a:lstStyle/>
+          <a:p>
+            <a:pPr algn="ctr" indent="0" marL="0">
+              <a:lnSpc>
+                <a:spcPct val="110000"/>
+              </a:lnSpc>
               <a:buNone/>
             </a:pPr>
             <a:r>
               <a:rPr lang="en-US" sz="1440" dirty="0">
                 <a:solidFill>
-                  <a:srgbClr val="8B98AC"/>
-                </a:solidFill>
-                <a:latin typeface="Courier New" pitchFamily="34" charset="0"/>
-                <a:ea typeface="Courier New" pitchFamily="34" charset="-122"/>
-                <a:cs typeface="Courier New" pitchFamily="34" charset="-120"/>
-              </a:rPr>
-              <a:t>ollama.com</a:t>
+                  <a:srgbClr val="E5E9F0"/>
+                </a:solidFill>
+                <a:latin typeface="Calibri" pitchFamily="34" charset="0"/>
+                <a:ea typeface="Calibri" pitchFamily="34" charset="-122"/>
+                <a:cs typeface="Calibri" pitchFamily="34" charset="-120"/>
+              </a:rPr>
+              <a:t>Ask questions — I read and reply.</a:t>
             </a:r>
             <a:endParaRPr lang="en-US" sz="1440" dirty="0"/>
           </a:p>
@@ -11302,13 +12584,13 @@
       </p:sp>
       <p:sp>
         <p:nvSpPr>
-          <p:cNvPr id="29" name="Shape 27"/>
-          <p:cNvSpPr/>
-          <p:nvPr/>
-        </p:nvSpPr>
-        <p:spPr>
-          <a:xfrm>
-            <a:off x="4251960" y="4892040"/>
+          <p:cNvPr id="33" name="Shape 31"/>
+          <p:cNvSpPr/>
+          <p:nvPr/>
+        </p:nvSpPr>
+        <p:spPr>
+          <a:xfrm>
+            <a:off x="4251960" y="5029200"/>
             <a:ext cx="3657600" cy="0"/>
           </a:xfrm>
           <a:prstGeom prst="line">
@@ -11327,13 +12609,13 @@
       </p:sp>
       <p:sp>
         <p:nvSpPr>
-          <p:cNvPr id="30" name="Shape 28"/>
-          <p:cNvSpPr/>
-          <p:nvPr/>
-        </p:nvSpPr>
-        <p:spPr>
-          <a:xfrm>
-            <a:off x="4210812" y="4850892"/>
+          <p:cNvPr id="34" name="Shape 32"/>
+          <p:cNvSpPr/>
+          <p:nvPr/>
+        </p:nvSpPr>
+        <p:spPr>
+          <a:xfrm>
+            <a:off x="4210812" y="4988052"/>
             <a:ext cx="82296" cy="82296"/>
           </a:xfrm>
           <a:prstGeom prst="ellipse">
@@ -11352,13 +12634,13 @@
       </p:sp>
       <p:sp>
         <p:nvSpPr>
-          <p:cNvPr id="31" name="Shape 29"/>
-          <p:cNvSpPr/>
-          <p:nvPr/>
-        </p:nvSpPr>
-        <p:spPr>
-          <a:xfrm>
-            <a:off x="6039612" y="4850892"/>
+          <p:cNvPr id="35" name="Shape 33"/>
+          <p:cNvSpPr/>
+          <p:nvPr/>
+        </p:nvSpPr>
+        <p:spPr>
+          <a:xfrm>
+            <a:off x="6039612" y="4988052"/>
             <a:ext cx="82296" cy="82296"/>
           </a:xfrm>
           <a:prstGeom prst="ellipse">
@@ -11377,13 +12659,13 @@
       </p:sp>
       <p:sp>
         <p:nvSpPr>
-          <p:cNvPr id="32" name="Shape 30"/>
-          <p:cNvSpPr/>
-          <p:nvPr/>
-        </p:nvSpPr>
-        <p:spPr>
-          <a:xfrm>
-            <a:off x="7868412" y="4850892"/>
+          <p:cNvPr id="36" name="Shape 34"/>
+          <p:cNvSpPr/>
+          <p:nvPr/>
+        </p:nvSpPr>
+        <p:spPr>
+          <a:xfrm>
+            <a:off x="7868412" y="4988052"/>
             <a:ext cx="82296" cy="82296"/>
           </a:xfrm>
           <a:prstGeom prst="ellipse">
@@ -11402,14 +12684,14 @@
       </p:sp>
       <p:sp>
         <p:nvSpPr>
-          <p:cNvPr id="33" name="Text 31"/>
-          <p:cNvSpPr/>
-          <p:nvPr/>
-        </p:nvSpPr>
-        <p:spPr>
-          <a:xfrm>
-            <a:off x="0" y="5120640"/>
-            <a:ext cx="12161520" cy="457200"/>
+          <p:cNvPr id="37" name="Text 35"/>
+          <p:cNvSpPr/>
+          <p:nvPr/>
+        </p:nvSpPr>
+        <p:spPr>
+          <a:xfrm>
+            <a:off x="0" y="5257800"/>
+            <a:ext cx="12161520" cy="365760"/>
           </a:xfrm>
           <a:prstGeom prst="rect">
             <a:avLst/>
@@ -11425,46 +12707,7 @@
               <a:buNone/>
             </a:pPr>
             <a:r>
-              <a:rPr lang="en-US" sz="1680" dirty="0">
-                <a:solidFill>
-                  <a:srgbClr val="E5E9F0"/>
-                </a:solidFill>
-                <a:latin typeface="Calibri" pitchFamily="34" charset="0"/>
-                <a:ea typeface="Calibri" pitchFamily="34" charset="-122"/>
-                <a:cs typeface="Calibri" pitchFamily="34" charset="-120"/>
-              </a:rPr>
-              <a:t>Shared with gratitude — all credit to their maintainers &amp; contributors.</a:t>
-            </a:r>
-            <a:endParaRPr lang="en-US" sz="1680" dirty="0"/>
-          </a:p>
-        </p:txBody>
-      </p:sp>
-      <p:sp>
-        <p:nvSpPr>
-          <p:cNvPr id="34" name="Text 32"/>
-          <p:cNvSpPr/>
-          <p:nvPr/>
-        </p:nvSpPr>
-        <p:spPr>
-          <a:xfrm>
-            <a:off x="0" y="5623560"/>
-            <a:ext cx="12161520" cy="365760"/>
-          </a:xfrm>
-          <a:prstGeom prst="rect">
-            <a:avLst/>
-          </a:prstGeom>
-          <a:noFill/>
-          <a:ln/>
-        </p:spPr>
-        <p:txBody>
-          <a:bodyPr wrap="square" lIns="0" tIns="0" rIns="0" bIns="0" rtlCol="0" anchor="ctr"/>
-          <a:lstStyle/>
-          <a:p>
-            <a:pPr algn="ctr" indent="0" marL="0">
-              <a:buNone/>
-            </a:pPr>
-            <a:r>
-              <a:rPr lang="en-US" sz="1440" dirty="0">
+              <a:rPr lang="en-US" sz="1560" dirty="0">
                 <a:solidFill>
                   <a:srgbClr val="8B98AC"/>
                 </a:solidFill>
@@ -11472,9 +12715,9 @@
                 <a:ea typeface="Courier New" pitchFamily="34" charset="-122"/>
                 <a:cs typeface="Courier New" pitchFamily="34" charset="-120"/>
               </a:rPr>
-              <a:t>github.com/balajich/spring-ai-with-llama</a:t>
-            </a:r>
-            <a:endParaRPr lang="en-US" sz="1440" dirty="0"/>
+              <a:t>New chapter every week  ·  Spring AI with Llama  ·  PromptToApps</a:t>
+            </a:r>
+            <a:endParaRPr lang="en-US" sz="1560" dirty="0"/>
           </a:p>
         </p:txBody>
       </p:sp>
